--- a/powerpoint/ARIANE_presentation_CS.pptx
+++ b/powerpoint/ARIANE_presentation_CS.pptx
@@ -5,14 +5,14 @@
     <p:sldMasterId id="2147483648" r:id="rId1"/>
   </p:sldMasterIdLst>
   <p:notesMasterIdLst>
-    <p:notesMasterId r:id="rId6"/>
+    <p:notesMasterId r:id="rId7"/>
   </p:notesMasterIdLst>
   <p:sldIdLst>
     <p:sldId id="256" r:id="rId2"/>
     <p:sldId id="257" r:id="rId3"/>
     <p:sldId id="258" r:id="rId4"/>
     <p:sldId id="259" r:id="rId5"/>
-    <p:sldId id="260" r:id="rId11"/>
+    <p:sldId id="260" r:id="rId6"/>
   </p:sldIdLst>
   <p:sldSz cx="12192000" cy="6858000"/>
   <p:notesSz cx="6858000" cy="9144000"/>
@@ -201,7 +201,7 @@
           <a:p>
             <a:fld id="{92451253-935D-46F9-9C3E-E33D74DC1BD2}" type="datetimeFigureOut">
               <a:rPr lang="en-US" smtClean="0"/>
-              <a:t>8/31/2026</a:t>
+              <a:t>9/1/2026</a:t>
             </a:fld>
             <a:endParaRPr lang="en-US"/>
           </a:p>
@@ -2054,8 +2054,12 @@
               <a:t>jsou</a:t>
             </a:r>
             <a:r>
-              <a:rPr lang="en-US"/>
-              <a:t> vhodný</a:t>
+              <a:rPr lang="en-US" dirty="0"/>
+              <a:t> </a:t>
+            </a:r>
+            <a:r>
+              <a:rPr lang="en-US" dirty="0" err="1"/>
+              <a:t>vhodný</a:t>
             </a:r>
             <a:r>
               <a:rPr lang="en-US" dirty="0"/>
@@ -2248,7 +2252,7 @@
           <a:p>
             <a:fld id="{56C7C647-8E80-4E6F-93AF-5D50231B1C81}" type="datetimeFigureOut">
               <a:rPr lang="en-US" smtClean="0"/>
-              <a:t>8/31/2026</a:t>
+              <a:t>9/1/2026</a:t>
             </a:fld>
             <a:endParaRPr lang="en-US"/>
           </a:p>
@@ -2446,7 +2450,7 @@
           <a:p>
             <a:fld id="{56C7C647-8E80-4E6F-93AF-5D50231B1C81}" type="datetimeFigureOut">
               <a:rPr lang="en-US" smtClean="0"/>
-              <a:t>8/31/2026</a:t>
+              <a:t>9/1/2026</a:t>
             </a:fld>
             <a:endParaRPr lang="en-US"/>
           </a:p>
@@ -2654,7 +2658,7 @@
           <a:p>
             <a:fld id="{56C7C647-8E80-4E6F-93AF-5D50231B1C81}" type="datetimeFigureOut">
               <a:rPr lang="en-US" smtClean="0"/>
-              <a:t>8/31/2026</a:t>
+              <a:t>9/1/2026</a:t>
             </a:fld>
             <a:endParaRPr lang="en-US"/>
           </a:p>
@@ -2887,7 +2891,7 @@
           <a:p>
             <a:fld id="{56C7C647-8E80-4E6F-93AF-5D50231B1C81}" type="datetimeFigureOut">
               <a:rPr lang="en-US" smtClean="0"/>
-              <a:t>8/31/2026</a:t>
+              <a:t>9/1/2026</a:t>
             </a:fld>
             <a:endParaRPr lang="en-US"/>
           </a:p>
@@ -3162,7 +3166,7 @@
           <a:p>
             <a:fld id="{56C7C647-8E80-4E6F-93AF-5D50231B1C81}" type="datetimeFigureOut">
               <a:rPr lang="en-US" smtClean="0"/>
-              <a:t>8/31/2026</a:t>
+              <a:t>9/1/2026</a:t>
             </a:fld>
             <a:endParaRPr lang="en-US"/>
           </a:p>
@@ -3427,7 +3431,7 @@
           <a:p>
             <a:fld id="{56C7C647-8E80-4E6F-93AF-5D50231B1C81}" type="datetimeFigureOut">
               <a:rPr lang="en-US" smtClean="0"/>
-              <a:t>8/31/2026</a:t>
+              <a:t>9/1/2026</a:t>
             </a:fld>
             <a:endParaRPr lang="en-US"/>
           </a:p>
@@ -3839,7 +3843,7 @@
           <a:p>
             <a:fld id="{56C7C647-8E80-4E6F-93AF-5D50231B1C81}" type="datetimeFigureOut">
               <a:rPr lang="en-US" smtClean="0"/>
-              <a:t>8/31/2026</a:t>
+              <a:t>9/1/2026</a:t>
             </a:fld>
             <a:endParaRPr lang="en-US"/>
           </a:p>
@@ -3980,7 +3984,7 @@
           <a:p>
             <a:fld id="{56C7C647-8E80-4E6F-93AF-5D50231B1C81}" type="datetimeFigureOut">
               <a:rPr lang="en-US" smtClean="0"/>
-              <a:t>8/31/2026</a:t>
+              <a:t>9/1/2026</a:t>
             </a:fld>
             <a:endParaRPr lang="en-US"/>
           </a:p>
@@ -4093,7 +4097,7 @@
           <a:p>
             <a:fld id="{56C7C647-8E80-4E6F-93AF-5D50231B1C81}" type="datetimeFigureOut">
               <a:rPr lang="en-US" smtClean="0"/>
-              <a:t>8/31/2026</a:t>
+              <a:t>9/1/2026</a:t>
             </a:fld>
             <a:endParaRPr lang="en-US"/>
           </a:p>
@@ -4404,7 +4408,7 @@
           <a:p>
             <a:fld id="{56C7C647-8E80-4E6F-93AF-5D50231B1C81}" type="datetimeFigureOut">
               <a:rPr lang="en-US" smtClean="0"/>
-              <a:t>8/31/2026</a:t>
+              <a:t>9/1/2026</a:t>
             </a:fld>
             <a:endParaRPr lang="en-US"/>
           </a:p>
@@ -4692,7 +4696,7 @@
           <a:p>
             <a:fld id="{56C7C647-8E80-4E6F-93AF-5D50231B1C81}" type="datetimeFigureOut">
               <a:rPr lang="en-US" smtClean="0"/>
-              <a:t>8/31/2026</a:t>
+              <a:t>9/1/2026</a:t>
             </a:fld>
             <a:endParaRPr lang="en-US"/>
           </a:p>
@@ -4933,7 +4937,7 @@
           <a:p>
             <a:fld id="{56C7C647-8E80-4E6F-93AF-5D50231B1C81}" type="datetimeFigureOut">
               <a:rPr lang="en-US" smtClean="0"/>
-              <a:t>8/31/2026</a:t>
+              <a:t>9/1/2026</a:t>
             </a:fld>
             <a:endParaRPr lang="en-US"/>
           </a:p>
@@ -10946,7 +10950,7 @@
 </file>
 
 <file path=ppt/slides/slide5.xml><?xml version="1.0" encoding="utf-8"?>
-<p:sld xmlns:a="http://schemas.openxmlformats.org/drawingml/2006/main" xmlns:p="http://schemas.openxmlformats.org/presentationml/2006/main" xmlns:r="http://schemas.openxmlformats.org/officeDocument/2006/relationships">
+<p:sld xmlns:a="http://schemas.openxmlformats.org/drawingml/2006/main" xmlns:r="http://schemas.openxmlformats.org/officeDocument/2006/relationships" xmlns:p="http://schemas.openxmlformats.org/presentationml/2006/main">
   <p:cSld>
     <p:bg>
       <p:bgPr>
@@ -10962,7 +10966,14 @@
         <p:cNvGrpSpPr/>
         <p:nvPr/>
       </p:nvGrpSpPr>
-      <p:grpSpPr/>
+      <p:grpSpPr>
+        <a:xfrm>
+          <a:off x="0" y="0"/>
+          <a:ext cx="0" cy="0"/>
+          <a:chOff x="0" y="0"/>
+          <a:chExt cx="0" cy="0"/>
+        </a:xfrm>
+      </p:grpSpPr>
       <p:sp>
         <p:nvSpPr>
           <p:cNvPr id="2" name="TextBox 1"/>
@@ -10980,7 +10991,7 @@
           <a:noFill/>
         </p:spPr>
         <p:txBody>
-          <a:bodyPr wrap="square" lIns="18288" rIns="18288" tIns="18288" bIns="18288">
+          <a:bodyPr wrap="square" lIns="18288" tIns="18288" rIns="18288" bIns="18288">
             <a:normAutofit/>
           </a:bodyPr>
           <a:lstStyle/>
@@ -11014,7 +11025,7 @@
           <a:noFill/>
         </p:spPr>
         <p:txBody>
-          <a:bodyPr wrap="square" lIns="18288" rIns="18288" tIns="18288" bIns="18288">
+          <a:bodyPr wrap="square" lIns="18288" tIns="18288" rIns="18288" bIns="18288">
             <a:normAutofit/>
           </a:bodyPr>
           <a:lstStyle/>
@@ -11071,6 +11082,7 @@
           <a:lstStyle/>
           <a:p>
             <a:pPr algn="ctr"/>
+            <a:endParaRPr/>
           </a:p>
         </p:txBody>
       </p:sp>
@@ -11115,7 +11127,7 @@
           <a:noFill/>
         </p:spPr>
         <p:txBody>
-          <a:bodyPr wrap="square" lIns="18288" rIns="18288" tIns="18288" bIns="18288">
+          <a:bodyPr wrap="square" lIns="18288" tIns="18288" rIns="18288" bIns="18288">
             <a:normAutofit/>
           </a:bodyPr>
           <a:lstStyle/>
@@ -11150,7 +11162,7 @@
           <a:noFill/>
         </p:spPr>
         <p:txBody>
-          <a:bodyPr wrap="square" lIns="18288" rIns="18288" tIns="18288" bIns="18288">
+          <a:bodyPr wrap="square" lIns="18288" tIns="18288" rIns="18288" bIns="18288">
             <a:normAutofit/>
           </a:bodyPr>
           <a:lstStyle/>
@@ -11206,7 +11218,7 @@
           </a:fontRef>
         </p:style>
         <p:txBody>
-          <a:bodyPr rtlCol="0" anchor="t" lIns="182880" rIns="182880" tIns="182880" bIns="164592" wrap="square">
+          <a:bodyPr wrap="square" lIns="182880" tIns="182880" rIns="182880" bIns="164592" rtlCol="0" anchor="t">
             <a:normAutofit/>
           </a:bodyPr>
           <a:lstStyle/>
@@ -11282,7 +11294,7 @@
           </a:fontRef>
         </p:style>
         <p:txBody>
-          <a:bodyPr rtlCol="0" anchor="t" lIns="182880" rIns="182880" tIns="182880" bIns="164592" wrap="square">
+          <a:bodyPr wrap="square" lIns="182880" tIns="182880" rIns="182880" bIns="164592" rtlCol="0" anchor="t">
             <a:normAutofit/>
           </a:bodyPr>
           <a:lstStyle/>
@@ -11358,7 +11370,7 @@
           </a:fontRef>
         </p:style>
         <p:txBody>
-          <a:bodyPr rtlCol="0" anchor="t" lIns="182880" rIns="182880" tIns="182880" bIns="164592" wrap="square">
+          <a:bodyPr wrap="square" lIns="182880" tIns="182880" rIns="182880" bIns="164592" rtlCol="0" anchor="t">
             <a:normAutofit/>
           </a:bodyPr>
           <a:lstStyle/>
@@ -11413,7 +11425,7 @@
           <a:noFill/>
         </p:spPr>
         <p:txBody>
-          <a:bodyPr wrap="none" lIns="18288" rIns="18288" tIns="0" bIns="0">
+          <a:bodyPr wrap="none" lIns="18288" tIns="0" rIns="18288" bIns="0">
             <a:spAutoFit/>
           </a:bodyPr>
           <a:lstStyle/>

--- a/powerpoint/ARIANE_presentation_CS.pptx
+++ b/powerpoint/ARIANE_presentation_CS.pptx
@@ -1852,7 +1852,16 @@
             <a:r>
               <a:rPr lang="en-US" dirty="0"/>
               <a:t>Tady zdůraznit, že ARIANE už je funkční aplikace, ne návrh nebo pilot.
-Formulace, že automatizuje části interpretace, je záměrně přesná. Aplikace automatizuje jen ta kritéria, která lze spolehlivě vyhodnotit z dostupných dat.
+</a:t>
+            </a:r>
+            <a:r>
+              <a:rPr lang="en-US"/>
+              <a:t>
+Aplikace</a:t>
+            </a:r>
+            <a:r>
+              <a:rPr lang="en-US" dirty="0"/>
+              <a:t> automatizuje jen ta kritéria, která lze spolehlivě vyhodnotit z dostupných dat.
 BRCA1 a BRCA2 jsou </a:t>
             </a:r>
             <a:r>
